--- a/Reporte 260526.pptx
+++ b/Reporte 260526.pptx
@@ -6962,6 +6962,36 @@
           </a:p>
         </p:txBody>
       </p:sp>
+      <p:pic>
+        <p:nvPicPr>
+          <p:cNvPr id="5" name="Imagen 4">
+            <a:extLst>
+              <a:ext uri="{FF2B5EF4-FFF2-40B4-BE49-F238E27FC236}">
+                <a16:creationId xmlns:a16="http://schemas.microsoft.com/office/drawing/2014/main" id="{9EFC69BF-0466-B27F-44C1-D10432B3B902}"/>
+              </a:ext>
+            </a:extLst>
+          </p:cNvPr>
+          <p:cNvPicPr>
+            <a:picLocks noChangeAspect="1"/>
+          </p:cNvPicPr>
+          <p:nvPr/>
+        </p:nvPicPr>
+        <p:blipFill>
+          <a:blip r:embed="rId2"/>
+          <a:stretch>
+            <a:fillRect/>
+          </a:stretch>
+        </p:blipFill>
+        <p:spPr>
+          <a:xfrm>
+            <a:off x="0" y="646567"/>
+            <a:ext cx="9144000" cy="3850366"/>
+          </a:xfrm>
+          <a:prstGeom prst="rect">
+            <a:avLst/>
+          </a:prstGeom>
+        </p:spPr>
+      </p:pic>
     </p:spTree>
     <p:extLst>
       <p:ext uri="{BB962C8B-B14F-4D97-AF65-F5344CB8AC3E}">
@@ -7042,10 +7072,10 @@
       </p:sp>
       <p:pic>
         <p:nvPicPr>
-          <p:cNvPr id="6" name="Imagen 5">
+          <p:cNvPr id="5" name="Imagen 4">
             <a:extLst>
               <a:ext uri="{FF2B5EF4-FFF2-40B4-BE49-F238E27FC236}">
-                <a16:creationId xmlns:a16="http://schemas.microsoft.com/office/drawing/2014/main" id="{E5708900-7912-E1B7-19B1-23A9CC4EDC1D}"/>
+                <a16:creationId xmlns:a16="http://schemas.microsoft.com/office/drawing/2014/main" id="{E02B3D4A-46F2-84F2-3F15-620D3EE0CD1A}"/>
               </a:ext>
             </a:extLst>
           </p:cNvPr>
@@ -7062,8 +7092,8 @@
         </p:blipFill>
         <p:spPr>
           <a:xfrm>
-            <a:off x="0" y="1255393"/>
-            <a:ext cx="9144000" cy="2775590"/>
+            <a:off x="0" y="1174543"/>
+            <a:ext cx="9144000" cy="2794414"/>
           </a:xfrm>
           <a:prstGeom prst="rect">
             <a:avLst/>
@@ -7156,10 +7186,10 @@
       </p:sp>
       <p:pic>
         <p:nvPicPr>
-          <p:cNvPr id="2" name="Imagen 1">
+          <p:cNvPr id="4" name="Imagen 3">
             <a:extLst>
               <a:ext uri="{FF2B5EF4-FFF2-40B4-BE49-F238E27FC236}">
-                <a16:creationId xmlns:a16="http://schemas.microsoft.com/office/drawing/2014/main" id="{9657BFFB-063A-5563-BA19-2966ED445774}"/>
+                <a16:creationId xmlns:a16="http://schemas.microsoft.com/office/drawing/2014/main" id="{E5624F94-0DDE-1382-8F6A-0A16D7D3C6C4}"/>
               </a:ext>
             </a:extLst>
           </p:cNvPr>
@@ -7176,8 +7206,8 @@
         </p:blipFill>
         <p:spPr>
           <a:xfrm>
-            <a:off x="793007" y="597488"/>
-            <a:ext cx="7484961" cy="4269712"/>
+            <a:off x="1149897" y="691088"/>
+            <a:ext cx="6844205" cy="3904200"/>
           </a:xfrm>
           <a:prstGeom prst="rect">
             <a:avLst/>
@@ -7260,10 +7290,10 @@
       </p:sp>
       <p:pic>
         <p:nvPicPr>
-          <p:cNvPr id="4" name="Imagen 3">
+          <p:cNvPr id="3" name="Imagen 2">
             <a:extLst>
               <a:ext uri="{FF2B5EF4-FFF2-40B4-BE49-F238E27FC236}">
-                <a16:creationId xmlns:a16="http://schemas.microsoft.com/office/drawing/2014/main" id="{FA83E319-B395-9F9F-561F-D8967F51D898}"/>
+                <a16:creationId xmlns:a16="http://schemas.microsoft.com/office/drawing/2014/main" id="{B84F1833-C635-0EAB-EA66-5A0D226FA8DF}"/>
               </a:ext>
             </a:extLst>
           </p:cNvPr>
@@ -7280,8 +7310,8 @@
         </p:blipFill>
         <p:spPr>
           <a:xfrm>
-            <a:off x="589994" y="1190423"/>
-            <a:ext cx="7964011" cy="2905530"/>
+            <a:off x="632863" y="309247"/>
+            <a:ext cx="7878274" cy="4525006"/>
           </a:xfrm>
           <a:prstGeom prst="rect">
             <a:avLst/>
@@ -7374,10 +7404,10 @@
       </p:sp>
       <p:pic>
         <p:nvPicPr>
-          <p:cNvPr id="6" name="Imagen 5">
+          <p:cNvPr id="3" name="Imagen 2">
             <a:extLst>
               <a:ext uri="{FF2B5EF4-FFF2-40B4-BE49-F238E27FC236}">
-                <a16:creationId xmlns:a16="http://schemas.microsoft.com/office/drawing/2014/main" id="{9EFFE806-38E2-07ED-B92B-2621C3F51B16}"/>
+                <a16:creationId xmlns:a16="http://schemas.microsoft.com/office/drawing/2014/main" id="{2FCBB340-D6DD-F5E1-76CF-92D1354C0033}"/>
               </a:ext>
             </a:extLst>
           </p:cNvPr>
@@ -7394,8 +7424,8 @@
         </p:blipFill>
         <p:spPr>
           <a:xfrm>
-            <a:off x="0" y="690319"/>
-            <a:ext cx="9144000" cy="3762862"/>
+            <a:off x="0" y="740247"/>
+            <a:ext cx="9144000" cy="3805881"/>
           </a:xfrm>
           <a:prstGeom prst="rect">
             <a:avLst/>
@@ -7488,10 +7518,10 @@
       </p:sp>
       <p:pic>
         <p:nvPicPr>
-          <p:cNvPr id="6" name="Imagen 5">
+          <p:cNvPr id="2" name="Imagen 1">
             <a:extLst>
               <a:ext uri="{FF2B5EF4-FFF2-40B4-BE49-F238E27FC236}">
-                <a16:creationId xmlns:a16="http://schemas.microsoft.com/office/drawing/2014/main" id="{EF1F0743-A88B-A82B-6C0C-DDAA7BCD78AD}"/>
+                <a16:creationId xmlns:a16="http://schemas.microsoft.com/office/drawing/2014/main" id="{67AC3E6B-1D37-5CF9-65AA-0EC6B7C0FACB}"/>
               </a:ext>
             </a:extLst>
           </p:cNvPr>
@@ -7509,7 +7539,7 @@
         <p:spPr>
           <a:xfrm>
             <a:off x="1" y="691088"/>
-            <a:ext cx="4535488" cy="3904200"/>
+            <a:ext cx="4572000" cy="3904200"/>
           </a:xfrm>
           <a:prstGeom prst="rect">
             <a:avLst/>
@@ -7518,10 +7548,10 @@
       </p:pic>
       <p:pic>
         <p:nvPicPr>
-          <p:cNvPr id="7" name="Imagen 6">
+          <p:cNvPr id="3" name="Imagen 2">
             <a:extLst>
               <a:ext uri="{FF2B5EF4-FFF2-40B4-BE49-F238E27FC236}">
-                <a16:creationId xmlns:a16="http://schemas.microsoft.com/office/drawing/2014/main" id="{1DF3ED15-3EA1-D24F-9B70-4EDFA6BBC78E}"/>
+                <a16:creationId xmlns:a16="http://schemas.microsoft.com/office/drawing/2014/main" id="{1147DC79-9BCE-AA5F-05FD-83E221E73F4B}"/>
               </a:ext>
             </a:extLst>
           </p:cNvPr>
@@ -7538,8 +7568,8 @@
         </p:blipFill>
         <p:spPr>
           <a:xfrm>
-            <a:off x="4608512" y="691088"/>
-            <a:ext cx="4535488" cy="3904200"/>
+            <a:off x="4535487" y="727144"/>
+            <a:ext cx="4608512" cy="3832088"/>
           </a:xfrm>
           <a:prstGeom prst="rect">
             <a:avLst/>
@@ -7616,10 +7646,10 @@
       </p:sp>
       <p:pic>
         <p:nvPicPr>
-          <p:cNvPr id="4" name="Imagen 3">
+          <p:cNvPr id="3" name="Imagen 2">
             <a:extLst>
               <a:ext uri="{FF2B5EF4-FFF2-40B4-BE49-F238E27FC236}">
-                <a16:creationId xmlns:a16="http://schemas.microsoft.com/office/drawing/2014/main" id="{7453ADB3-2BB8-95A7-7663-A86E93E134F1}"/>
+                <a16:creationId xmlns:a16="http://schemas.microsoft.com/office/drawing/2014/main" id="{A67E415B-57D3-62ED-44E7-E427BE7DBC2D}"/>
               </a:ext>
             </a:extLst>
           </p:cNvPr>
@@ -7636,8 +7666,8 @@
         </p:blipFill>
         <p:spPr>
           <a:xfrm>
-            <a:off x="1421834" y="1433867"/>
-            <a:ext cx="6227307" cy="2418641"/>
+            <a:off x="1442601" y="885589"/>
+            <a:ext cx="6258798" cy="3372321"/>
           </a:xfrm>
           <a:prstGeom prst="rect">
             <a:avLst/>

--- a/Reporte 260526.pptx
+++ b/Reporte 260526.pptx
@@ -5,7 +5,7 @@
     <p:sldMasterId id="2147483672" r:id="rId1"/>
   </p:sldMasterIdLst>
   <p:notesMasterIdLst>
-    <p:notesMasterId r:id="rId18"/>
+    <p:notesMasterId r:id="rId17"/>
   </p:notesMasterIdLst>
   <p:sldIdLst>
     <p:sldId id="350" r:id="rId2"/>
@@ -21,25 +21,24 @@
     <p:sldId id="369" r:id="rId12"/>
     <p:sldId id="361" r:id="rId13"/>
     <p:sldId id="371" r:id="rId14"/>
-    <p:sldId id="398" r:id="rId15"/>
-    <p:sldId id="384" r:id="rId16"/>
-    <p:sldId id="280" r:id="rId17"/>
+    <p:sldId id="384" r:id="rId15"/>
+    <p:sldId id="280" r:id="rId16"/>
   </p:sldIdLst>
   <p:sldSz cx="9144000" cy="5143500" type="screen16x9"/>
   <p:notesSz cx="6858000" cy="9144000"/>
   <p:embeddedFontLst>
     <p:embeddedFont>
       <p:font typeface="Montserrat" panose="00000500000000000000" pitchFamily="2" charset="0"/>
-      <p:regular r:id="rId19"/>
-      <p:bold r:id="rId20"/>
-      <p:italic r:id="rId21"/>
-      <p:boldItalic r:id="rId22"/>
+      <p:regular r:id="rId18"/>
+      <p:bold r:id="rId19"/>
+      <p:italic r:id="rId20"/>
+      <p:boldItalic r:id="rId21"/>
     </p:embeddedFont>
     <p:embeddedFont>
       <p:font typeface="Montserrat Black" panose="00000A00000000000000" pitchFamily="2" charset="0"/>
-      <p:bold r:id="rId23"/>
-      <p:italic r:id="rId24"/>
-      <p:boldItalic r:id="rId25"/>
+      <p:bold r:id="rId22"/>
+      <p:italic r:id="rId23"/>
+      <p:boldItalic r:id="rId24"/>
     </p:embeddedFont>
   </p:embeddedFontLst>
   <p:defaultTextStyle>
@@ -6294,10 +6293,10 @@
       </p:sp>
       <p:pic>
         <p:nvPicPr>
-          <p:cNvPr id="3" name="Imagen 2">
+          <p:cNvPr id="4" name="Imagen 3">
             <a:extLst>
               <a:ext uri="{FF2B5EF4-FFF2-40B4-BE49-F238E27FC236}">
-                <a16:creationId xmlns:a16="http://schemas.microsoft.com/office/drawing/2014/main" id="{6EF6A18D-F572-59B9-6C7A-62D1836B0210}"/>
+                <a16:creationId xmlns:a16="http://schemas.microsoft.com/office/drawing/2014/main" id="{1568C9F9-2867-AC59-F262-E76FE9B96FF4}"/>
               </a:ext>
             </a:extLst>
           </p:cNvPr>
@@ -6314,8 +6313,8 @@
         </p:blipFill>
         <p:spPr>
           <a:xfrm>
-            <a:off x="0" y="1157984"/>
-            <a:ext cx="9144000" cy="2970408"/>
+            <a:off x="0" y="1148224"/>
+            <a:ext cx="9144000" cy="2847051"/>
           </a:xfrm>
           <a:prstGeom prst="rect">
             <a:avLst/>
@@ -6398,10 +6397,10 @@
       </p:sp>
       <p:pic>
         <p:nvPicPr>
-          <p:cNvPr id="4" name="Imagen 3">
+          <p:cNvPr id="3" name="Imagen 2">
             <a:extLst>
               <a:ext uri="{FF2B5EF4-FFF2-40B4-BE49-F238E27FC236}">
-                <a16:creationId xmlns:a16="http://schemas.microsoft.com/office/drawing/2014/main" id="{E94C1190-FDE4-6D4A-D9D9-D20ACDBB3325}"/>
+                <a16:creationId xmlns:a16="http://schemas.microsoft.com/office/drawing/2014/main" id="{3557528E-1F2D-EE75-28EA-DD68017FD194}"/>
               </a:ext>
             </a:extLst>
           </p:cNvPr>
@@ -6418,8 +6417,8 @@
         </p:blipFill>
         <p:spPr>
           <a:xfrm>
-            <a:off x="0" y="462696"/>
-            <a:ext cx="9144000" cy="4360984"/>
+            <a:off x="0" y="417888"/>
+            <a:ext cx="9144000" cy="4307723"/>
           </a:xfrm>
           <a:prstGeom prst="rect">
             <a:avLst/>
@@ -6496,10 +6495,10 @@
       </p:sp>
       <p:pic>
         <p:nvPicPr>
-          <p:cNvPr id="4" name="Imagen 3">
+          <p:cNvPr id="5" name="Imagen 4">
             <a:extLst>
               <a:ext uri="{FF2B5EF4-FFF2-40B4-BE49-F238E27FC236}">
-                <a16:creationId xmlns:a16="http://schemas.microsoft.com/office/drawing/2014/main" id="{E7A1B0E5-3C7A-143C-C740-63E6B84FD810}"/>
+                <a16:creationId xmlns:a16="http://schemas.microsoft.com/office/drawing/2014/main" id="{21A72CE9-2FBB-1475-020D-6F88D395FDE7}"/>
               </a:ext>
             </a:extLst>
           </p:cNvPr>
@@ -6516,8 +6515,8 @@
         </p:blipFill>
         <p:spPr>
           <a:xfrm>
-            <a:off x="0" y="1097404"/>
-            <a:ext cx="9144000" cy="3091567"/>
+            <a:off x="0" y="987093"/>
+            <a:ext cx="9144000" cy="3169314"/>
           </a:xfrm>
           <a:prstGeom prst="rect">
             <a:avLst/>
@@ -6594,10 +6593,10 @@
       </p:sp>
       <p:pic>
         <p:nvPicPr>
-          <p:cNvPr id="4" name="Imagen 3">
+          <p:cNvPr id="3" name="Imagen 2">
             <a:extLst>
               <a:ext uri="{FF2B5EF4-FFF2-40B4-BE49-F238E27FC236}">
-                <a16:creationId xmlns:a16="http://schemas.microsoft.com/office/drawing/2014/main" id="{29BFA30F-8B3A-944A-4770-E57102F97776}"/>
+                <a16:creationId xmlns:a16="http://schemas.microsoft.com/office/drawing/2014/main" id="{0889D5F8-BBBD-750F-6A1A-41B841CED7C2}"/>
               </a:ext>
             </a:extLst>
           </p:cNvPr>
@@ -6614,8 +6613,8 @@
         </p:blipFill>
         <p:spPr>
           <a:xfrm>
-            <a:off x="0" y="459886"/>
-            <a:ext cx="9144000" cy="4366603"/>
+            <a:off x="0" y="630972"/>
+            <a:ext cx="9144000" cy="3881555"/>
           </a:xfrm>
           <a:prstGeom prst="rect">
             <a:avLst/>
@@ -6636,110 +6635,6 @@
 </file>
 
 <file path=ppt/slides/slide14.xml><?xml version="1.0" encoding="utf-8"?>
-<p:sld xmlns:a="http://schemas.openxmlformats.org/drawingml/2006/main" xmlns:r="http://schemas.openxmlformats.org/officeDocument/2006/relationships" xmlns:p="http://schemas.openxmlformats.org/presentationml/2006/main">
-  <p:cSld>
-    <p:spTree>
-      <p:nvGrpSpPr>
-        <p:cNvPr id="1" name="">
-          <a:extLst>
-            <a:ext uri="{FF2B5EF4-FFF2-40B4-BE49-F238E27FC236}">
-              <a16:creationId xmlns:a16="http://schemas.microsoft.com/office/drawing/2014/main" id="{25AC7708-DCCA-DE7C-B9EB-ED6BAEAADFC7}"/>
-            </a:ext>
-          </a:extLst>
-        </p:cNvPr>
-        <p:cNvGrpSpPr/>
-        <p:nvPr/>
-      </p:nvGrpSpPr>
-      <p:grpSpPr>
-        <a:xfrm>
-          <a:off x="0" y="0"/>
-          <a:ext cx="0" cy="0"/>
-          <a:chOff x="0" y="0"/>
-          <a:chExt cx="0" cy="0"/>
-        </a:xfrm>
-      </p:grpSpPr>
-      <p:sp>
-        <p:nvSpPr>
-          <p:cNvPr id="6" name="CuadroTexto 5">
-            <a:extLst>
-              <a:ext uri="{FF2B5EF4-FFF2-40B4-BE49-F238E27FC236}">
-                <a16:creationId xmlns:a16="http://schemas.microsoft.com/office/drawing/2014/main" id="{2C3C8974-6B06-B7AB-35FE-D8F2FAD85529}"/>
-              </a:ext>
-            </a:extLst>
-          </p:cNvPr>
-          <p:cNvSpPr txBox="1"/>
-          <p:nvPr/>
-        </p:nvSpPr>
-        <p:spPr>
-          <a:xfrm>
-            <a:off x="1926166" y="88135"/>
-            <a:ext cx="5291667" cy="307777"/>
-          </a:xfrm>
-          <a:prstGeom prst="rect">
-            <a:avLst/>
-          </a:prstGeom>
-          <a:noFill/>
-        </p:spPr>
-        <p:txBody>
-          <a:bodyPr wrap="square" rtlCol="0">
-            <a:spAutoFit/>
-          </a:bodyPr>
-          <a:lstStyle/>
-          <a:p>
-            <a:pPr algn="ctr"/>
-            <a:r>
-              <a:rPr lang="es-MX" b="1" dirty="0">
-                <a:latin typeface="Montserrat" pitchFamily="2" charset="0"/>
-              </a:rPr>
-              <a:t>Temas de gobierno por radiodifusora</a:t>
-            </a:r>
-          </a:p>
-        </p:txBody>
-      </p:sp>
-      <p:pic>
-        <p:nvPicPr>
-          <p:cNvPr id="3" name="Imagen 2">
-            <a:extLst>
-              <a:ext uri="{FF2B5EF4-FFF2-40B4-BE49-F238E27FC236}">
-                <a16:creationId xmlns:a16="http://schemas.microsoft.com/office/drawing/2014/main" id="{5B6F5D09-DDDF-D1A0-815B-7E338948B849}"/>
-              </a:ext>
-            </a:extLst>
-          </p:cNvPr>
-          <p:cNvPicPr>
-            <a:picLocks noChangeAspect="1"/>
-          </p:cNvPicPr>
-          <p:nvPr/>
-        </p:nvPicPr>
-        <p:blipFill>
-          <a:blip r:embed="rId2"/>
-          <a:stretch>
-            <a:fillRect/>
-          </a:stretch>
-        </p:blipFill>
-        <p:spPr>
-          <a:xfrm>
-            <a:off x="0" y="1517453"/>
-            <a:ext cx="9144000" cy="2108594"/>
-          </a:xfrm>
-          <a:prstGeom prst="rect">
-            <a:avLst/>
-          </a:prstGeom>
-        </p:spPr>
-      </p:pic>
-    </p:spTree>
-    <p:extLst>
-      <p:ext uri="{BB962C8B-B14F-4D97-AF65-F5344CB8AC3E}">
-        <p14:creationId xmlns:p14="http://schemas.microsoft.com/office/powerpoint/2010/main" val="4108755736"/>
-      </p:ext>
-    </p:extLst>
-  </p:cSld>
-  <p:clrMapOvr>
-    <a:masterClrMapping/>
-  </p:clrMapOvr>
-</p:sld>
-</file>
-
-<file path=ppt/slides/slide15.xml><?xml version="1.0" encoding="utf-8"?>
 <p:sld xmlns:a="http://schemas.openxmlformats.org/drawingml/2006/main" xmlns:r="http://schemas.openxmlformats.org/officeDocument/2006/relationships" xmlns:p="http://schemas.openxmlformats.org/presentationml/2006/main">
   <p:cSld>
     <p:spTree>
@@ -6796,10 +6691,10 @@
       </p:sp>
       <p:pic>
         <p:nvPicPr>
-          <p:cNvPr id="5" name="Imagen 4">
+          <p:cNvPr id="3" name="Imagen 2">
             <a:extLst>
               <a:ext uri="{FF2B5EF4-FFF2-40B4-BE49-F238E27FC236}">
-                <a16:creationId xmlns:a16="http://schemas.microsoft.com/office/drawing/2014/main" id="{BD30E29A-6825-7627-6C32-908BE6F711F9}"/>
+                <a16:creationId xmlns:a16="http://schemas.microsoft.com/office/drawing/2014/main" id="{EB8E8162-D630-785B-94BC-D319B2BAA0EC}"/>
               </a:ext>
             </a:extLst>
           </p:cNvPr>
@@ -6816,8 +6711,8 @@
         </p:blipFill>
         <p:spPr>
           <a:xfrm>
-            <a:off x="0" y="861018"/>
-            <a:ext cx="9144000" cy="3421463"/>
+            <a:off x="0" y="806470"/>
+            <a:ext cx="9144000" cy="3530559"/>
           </a:xfrm>
           <a:prstGeom prst="rect">
             <a:avLst/>
@@ -6837,7 +6732,7 @@
 </p:sld>
 </file>
 
-<file path=ppt/slides/slide16.xml><?xml version="1.0" encoding="utf-8"?>
+<file path=ppt/slides/slide15.xml><?xml version="1.0" encoding="utf-8"?>
 <p:sld xmlns:a="http://schemas.openxmlformats.org/drawingml/2006/main" xmlns:r="http://schemas.openxmlformats.org/officeDocument/2006/relationships" xmlns:p="http://schemas.openxmlformats.org/presentationml/2006/main">
   <p:cSld>
     <p:spTree>
@@ -7750,10 +7645,10 @@
       </p:sp>
       <p:pic>
         <p:nvPicPr>
-          <p:cNvPr id="5" name="Imagen 4">
+          <p:cNvPr id="7" name="Imagen 6">
             <a:extLst>
               <a:ext uri="{FF2B5EF4-FFF2-40B4-BE49-F238E27FC236}">
-                <a16:creationId xmlns:a16="http://schemas.microsoft.com/office/drawing/2014/main" id="{D6845FE9-8A0F-513E-8288-497210BE9827}"/>
+                <a16:creationId xmlns:a16="http://schemas.microsoft.com/office/drawing/2014/main" id="{FD39E68A-78E0-2C0A-F9FF-7DADF4AA45CC}"/>
               </a:ext>
             </a:extLst>
           </p:cNvPr>
@@ -7770,8 +7665,8 @@
         </p:blipFill>
         <p:spPr>
           <a:xfrm>
-            <a:off x="0" y="696643"/>
-            <a:ext cx="9144000" cy="3893089"/>
+            <a:off x="0" y="604785"/>
+            <a:ext cx="9144000" cy="3933930"/>
           </a:xfrm>
           <a:prstGeom prst="rect">
             <a:avLst/>
